--- a/experiments/BioShield_class_presentation_v2.pptx
+++ b/experiments/BioShield_class_presentation_v2.pptx
@@ -3716,13 +3716,13 @@
               </a:lnSpc>
             </a:pPr>
             <a:r>
-              <a:rPr sz="3400" b="0" i="1">
+              <a:rPr sz="3200" b="0" i="1">
                 <a:solidFill>
                   <a:srgbClr val="1A1A1A"/>
                 </a:solidFill>
                 <a:latin typeface="Georgia"/>
               </a:rPr>
-              <a:t>The detector is learning.</a:t>
+              <a:t>The story is generator family — not rounds.</a:t>
             </a:r>
           </a:p>
         </p:txBody>
@@ -3761,7 +3761,7 @@
                 </a:solidFill>
                 <a:latin typeface="Helvetica Neue"/>
               </a:rPr>
-              <a:t>Condition B  ·  evasion rate on the SeqGAN fake pool, round over round.</a:t>
+              <a:t>Evasion rate, final round, by generator family. Same detector, same test set, 100× spread.</a:t>
             </a:r>
           </a:p>
         </p:txBody>
@@ -3774,8 +3774,8 @@
         </p:nvSpPr>
         <p:spPr>
           <a:xfrm>
-            <a:off x="640080" y="2834640"/>
-            <a:ext cx="3200400" cy="1463040"/>
+            <a:off x="640080" y="2743200"/>
+            <a:ext cx="3657600" cy="1371600"/>
           </a:xfrm>
           <a:prstGeom prst="rect">
             <a:avLst/>
@@ -3800,7 +3800,7 @@
                 </a:solidFill>
                 <a:latin typeface="Georgia"/>
               </a:rPr>
-              <a:t>0.74</a:t>
+              <a:t>99%</a:t>
             </a:r>
           </a:p>
         </p:txBody>
@@ -3813,8 +3813,8 @@
         </p:nvSpPr>
         <p:spPr>
           <a:xfrm>
-            <a:off x="640080" y="4343400"/>
-            <a:ext cx="3200400" cy="365760"/>
+            <a:off x="640080" y="4251960"/>
+            <a:ext cx="3657600" cy="365760"/>
           </a:xfrm>
           <a:prstGeom prst="rect">
             <a:avLst/>
@@ -3833,52 +3833,56 @@
               </a:lnSpc>
             </a:pPr>
             <a:r>
-              <a:rPr sz="1100" b="1" i="0">
+              <a:rPr sz="1200" b="1" i="0">
+                <a:solidFill>
+                  <a:srgbClr val="1A1A1A"/>
+                </a:solidFill>
+                <a:latin typeface="Helvetica Neue"/>
+              </a:rPr>
+              <a:t>SEQGAN</a:t>
+            </a:r>
+          </a:p>
+        </p:txBody>
+      </p:sp>
+      <p:sp>
+        <p:nvSpPr>
+          <p:cNvPr id="11" name="TextBox 10"/>
+          <p:cNvSpPr txBox="1"/>
+          <p:nvPr/>
+        </p:nvSpPr>
+        <p:spPr>
+          <a:xfrm>
+            <a:off x="640080" y="4617720"/>
+            <a:ext cx="3657600" cy="365760"/>
+          </a:xfrm>
+          <a:prstGeom prst="rect">
+            <a:avLst/>
+          </a:prstGeom>
+          <a:noFill/>
+        </p:spPr>
+        <p:txBody>
+          <a:bodyPr wrap="square" lIns="0" rIns="0" tIns="0" bIns="0" anchor="t">
+            <a:spAutoFit/>
+          </a:bodyPr>
+          <a:lstStyle/>
+          <a:p>
+            <a:pPr algn="ctr">
+              <a:lnSpc>
+                <a:spcPct val="115000"/>
+              </a:lnSpc>
+            </a:pPr>
+            <a:r>
+              <a:rPr sz="1000" b="0" i="0">
                 <a:solidFill>
                   <a:srgbClr val="8C8378"/>
                 </a:solidFill>
                 <a:latin typeface="Helvetica Neue"/>
               </a:rPr>
-              <a:t>ROUND 1</a:t>
-            </a:r>
-          </a:p>
-        </p:txBody>
-      </p:sp>
-      <p:cxnSp>
-        <p:nvCxnSpPr>
-          <p:cNvPr id="11" name="Connector 10"/>
-          <p:cNvCxnSpPr/>
-          <p:nvPr/>
-        </p:nvCxnSpPr>
-        <p:spPr>
-          <a:xfrm>
-            <a:off x="3858768" y="3566160"/>
-            <a:ext cx="228600" cy="0"/>
-          </a:xfrm>
-          <a:prstGeom prst="line">
-            <a:avLst/>
-          </a:prstGeom>
-          <a:ln w="15875">
-            <a:solidFill>
-              <a:srgbClr val="8C8378"/>
-            </a:solidFill>
-          </a:ln>
-        </p:spPr>
-        <p:style>
-          <a:lnRef idx="2">
-            <a:schemeClr val="accent1"/>
-          </a:lnRef>
-          <a:fillRef idx="0">
-            <a:schemeClr val="accent1"/>
-          </a:fillRef>
-          <a:effectRef idx="1">
-            <a:schemeClr val="accent1"/>
-          </a:effectRef>
-          <a:fontRef idx="minor">
-            <a:schemeClr val="tx1"/>
-          </a:fontRef>
-        </p:style>
-      </p:cxnSp>
+              <a:t>Condition B final round</a:t>
+            </a:r>
+          </a:p>
+        </p:txBody>
+      </p:sp>
       <p:sp>
         <p:nvSpPr>
           <p:cNvPr id="12" name="TextBox 11"/>
@@ -3887,8 +3891,8 @@
         </p:nvSpPr>
         <p:spPr>
           <a:xfrm>
-            <a:off x="4114800" y="2834640"/>
-            <a:ext cx="3200400" cy="1463040"/>
+            <a:off x="4389120" y="2743200"/>
+            <a:ext cx="3657600" cy="1371600"/>
           </a:xfrm>
           <a:prstGeom prst="rect">
             <a:avLst/>
@@ -3909,25 +3913,142 @@
             <a:r>
               <a:rPr sz="8600" b="0" i="1">
                 <a:solidFill>
+                  <a:srgbClr val="2C5E4A"/>
+                </a:solidFill>
+                <a:latin typeface="Georgia"/>
+              </a:rPr>
+              <a:t>0.7%</a:t>
+            </a:r>
+          </a:p>
+        </p:txBody>
+      </p:sp>
+      <p:sp>
+        <p:nvSpPr>
+          <p:cNvPr id="13" name="TextBox 12"/>
+          <p:cNvSpPr txBox="1"/>
+          <p:nvPr/>
+        </p:nvSpPr>
+        <p:spPr>
+          <a:xfrm>
+            <a:off x="4389120" y="4251960"/>
+            <a:ext cx="3657600" cy="365760"/>
+          </a:xfrm>
+          <a:prstGeom prst="rect">
+            <a:avLst/>
+          </a:prstGeom>
+          <a:noFill/>
+        </p:spPr>
+        <p:txBody>
+          <a:bodyPr wrap="square" lIns="0" rIns="0" tIns="0" bIns="0" anchor="t">
+            <a:spAutoFit/>
+          </a:bodyPr>
+          <a:lstStyle/>
+          <a:p>
+            <a:pPr algn="ctr">
+              <a:lnSpc>
+                <a:spcPct val="115000"/>
+              </a:lnSpc>
+            </a:pPr>
+            <a:r>
+              <a:rPr sz="1200" b="1" i="0">
+                <a:solidFill>
+                  <a:srgbClr val="1A1A1A"/>
+                </a:solidFill>
+                <a:latin typeface="Helvetica Neue"/>
+              </a:rPr>
+              <a:t>BIOMISTRAL</a:t>
+            </a:r>
+          </a:p>
+        </p:txBody>
+      </p:sp>
+      <p:sp>
+        <p:nvSpPr>
+          <p:cNvPr id="14" name="TextBox 13"/>
+          <p:cNvSpPr txBox="1"/>
+          <p:nvPr/>
+        </p:nvSpPr>
+        <p:spPr>
+          <a:xfrm>
+            <a:off x="4389120" y="4617720"/>
+            <a:ext cx="3657600" cy="365760"/>
+          </a:xfrm>
+          <a:prstGeom prst="rect">
+            <a:avLst/>
+          </a:prstGeom>
+          <a:noFill/>
+        </p:spPr>
+        <p:txBody>
+          <a:bodyPr wrap="square" lIns="0" rIns="0" tIns="0" bIns="0" anchor="t">
+            <a:spAutoFit/>
+          </a:bodyPr>
+          <a:lstStyle/>
+          <a:p>
+            <a:pPr algn="ctr">
+              <a:lnSpc>
+                <a:spcPct val="115000"/>
+              </a:lnSpc>
+            </a:pPr>
+            <a:r>
+              <a:rPr sz="1000" b="0" i="0">
+                <a:solidFill>
                   <a:srgbClr val="8C8378"/>
                 </a:solidFill>
+                <a:latin typeface="Helvetica Neue"/>
+              </a:rPr>
+              <a:t>Conditions C + D final round</a:t>
+            </a:r>
+          </a:p>
+        </p:txBody>
+      </p:sp>
+      <p:sp>
+        <p:nvSpPr>
+          <p:cNvPr id="15" name="TextBox 14"/>
+          <p:cNvSpPr txBox="1"/>
+          <p:nvPr/>
+        </p:nvSpPr>
+        <p:spPr>
+          <a:xfrm>
+            <a:off x="8138160" y="2743200"/>
+            <a:ext cx="3657600" cy="1371600"/>
+          </a:xfrm>
+          <a:prstGeom prst="rect">
+            <a:avLst/>
+          </a:prstGeom>
+          <a:noFill/>
+        </p:spPr>
+        <p:txBody>
+          <a:bodyPr wrap="square" lIns="0" rIns="0" tIns="0" bIns="0" anchor="t">
+            <a:spAutoFit/>
+          </a:bodyPr>
+          <a:lstStyle/>
+          <a:p>
+            <a:pPr algn="ctr">
+              <a:lnSpc>
+                <a:spcPct val="115000"/>
+              </a:lnSpc>
+            </a:pPr>
+            <a:r>
+              <a:rPr sz="8600" b="0" i="1">
+                <a:solidFill>
+                  <a:srgbClr val="8C8378"/>
+                </a:solidFill>
                 <a:latin typeface="Georgia"/>
               </a:rPr>
-              <a:t>0.64</a:t>
-            </a:r>
-          </a:p>
-        </p:txBody>
-      </p:sp>
-      <p:sp>
-        <p:nvSpPr>
-          <p:cNvPr id="13" name="TextBox 12"/>
-          <p:cNvSpPr txBox="1"/>
-          <p:nvPr/>
-        </p:nvSpPr>
-        <p:spPr>
-          <a:xfrm>
-            <a:off x="4114800" y="4343400"/>
-            <a:ext cx="3200400" cy="365760"/>
+              <a:t>98%</a:t>
+            </a:r>
+          </a:p>
+        </p:txBody>
+      </p:sp>
+      <p:sp>
+        <p:nvSpPr>
+          <p:cNvPr id="16" name="TextBox 15"/>
+          <p:cNvSpPr txBox="1"/>
+          <p:nvPr/>
+        </p:nvSpPr>
+        <p:spPr>
+          <a:xfrm>
+            <a:off x="8138160" y="4251960"/>
+            <a:ext cx="3657600" cy="365760"/>
           </a:xfrm>
           <a:prstGeom prst="rect">
             <a:avLst/>
@@ -3946,140 +4067,66 @@
               </a:lnSpc>
             </a:pPr>
             <a:r>
-              <a:rPr sz="1100" b="1" i="0">
+              <a:rPr sz="1200" b="1" i="0">
+                <a:solidFill>
+                  <a:srgbClr val="1A1A1A"/>
+                </a:solidFill>
+                <a:latin typeface="Helvetica Neue"/>
+              </a:rPr>
+              <a:t>RAID</a:t>
+            </a:r>
+          </a:p>
+        </p:txBody>
+      </p:sp>
+      <p:sp>
+        <p:nvSpPr>
+          <p:cNvPr id="17" name="TextBox 16"/>
+          <p:cNvSpPr txBox="1"/>
+          <p:nvPr/>
+        </p:nvSpPr>
+        <p:spPr>
+          <a:xfrm>
+            <a:off x="8138160" y="4617720"/>
+            <a:ext cx="3657600" cy="365760"/>
+          </a:xfrm>
+          <a:prstGeom prst="rect">
+            <a:avLst/>
+          </a:prstGeom>
+          <a:noFill/>
+        </p:spPr>
+        <p:txBody>
+          <a:bodyPr wrap="square" lIns="0" rIns="0" tIns="0" bIns="0" anchor="t">
+            <a:spAutoFit/>
+          </a:bodyPr>
+          <a:lstStyle/>
+          <a:p>
+            <a:pPr algn="ctr">
+              <a:lnSpc>
+                <a:spcPct val="115000"/>
+              </a:lnSpc>
+            </a:pPr>
+            <a:r>
+              <a:rPr sz="1000" b="0" i="0">
                 <a:solidFill>
                   <a:srgbClr val="8C8378"/>
                 </a:solidFill>
                 <a:latin typeface="Helvetica Neue"/>
               </a:rPr>
-              <a:t>ROUND 2</a:t>
-            </a:r>
-          </a:p>
-        </p:txBody>
-      </p:sp>
-      <p:cxnSp>
-        <p:nvCxnSpPr>
-          <p:cNvPr id="14" name="Connector 13"/>
-          <p:cNvCxnSpPr/>
-          <p:nvPr/>
-        </p:nvCxnSpPr>
-        <p:spPr>
-          <a:xfrm>
-            <a:off x="7333488" y="3566160"/>
-            <a:ext cx="228600" cy="0"/>
-          </a:xfrm>
-          <a:prstGeom prst="line">
-            <a:avLst/>
-          </a:prstGeom>
-          <a:ln w="15875">
-            <a:solidFill>
-              <a:srgbClr val="8C8378"/>
-            </a:solidFill>
-          </a:ln>
-        </p:spPr>
-        <p:style>
-          <a:lnRef idx="2">
-            <a:schemeClr val="accent1"/>
-          </a:lnRef>
-          <a:fillRef idx="0">
-            <a:schemeClr val="accent1"/>
-          </a:fillRef>
-          <a:effectRef idx="1">
-            <a:schemeClr val="accent1"/>
-          </a:effectRef>
-          <a:fontRef idx="minor">
-            <a:schemeClr val="tx1"/>
-          </a:fontRef>
-        </p:style>
-      </p:cxnSp>
-      <p:sp>
-        <p:nvSpPr>
-          <p:cNvPr id="15" name="TextBox 14"/>
-          <p:cNvSpPr txBox="1"/>
-          <p:nvPr/>
-        </p:nvSpPr>
-        <p:spPr>
-          <a:xfrm>
-            <a:off x="7589520" y="2834640"/>
-            <a:ext cx="3200400" cy="1463040"/>
-          </a:xfrm>
-          <a:prstGeom prst="rect">
-            <a:avLst/>
-          </a:prstGeom>
-          <a:noFill/>
-        </p:spPr>
-        <p:txBody>
-          <a:bodyPr wrap="square" lIns="0" rIns="0" tIns="0" bIns="0" anchor="t">
-            <a:spAutoFit/>
-          </a:bodyPr>
-          <a:lstStyle/>
-          <a:p>
-            <a:pPr algn="ctr">
-              <a:lnSpc>
-                <a:spcPct val="115000"/>
-              </a:lnSpc>
-            </a:pPr>
-            <a:r>
-              <a:rPr sz="8600" b="0" i="1">
-                <a:solidFill>
-                  <a:srgbClr val="2C5E4A"/>
-                </a:solidFill>
-                <a:latin typeface="Georgia"/>
-              </a:rPr>
-              <a:t>0.54</a:t>
-            </a:r>
-          </a:p>
-        </p:txBody>
-      </p:sp>
-      <p:sp>
-        <p:nvSpPr>
-          <p:cNvPr id="16" name="TextBox 15"/>
-          <p:cNvSpPr txBox="1"/>
-          <p:nvPr/>
-        </p:nvSpPr>
-        <p:spPr>
-          <a:xfrm>
-            <a:off x="7589520" y="4343400"/>
-            <a:ext cx="3200400" cy="365760"/>
-          </a:xfrm>
-          <a:prstGeom prst="rect">
-            <a:avLst/>
-          </a:prstGeom>
-          <a:noFill/>
-        </p:spPr>
-        <p:txBody>
-          <a:bodyPr wrap="square" lIns="0" rIns="0" tIns="0" bIns="0" anchor="t">
-            <a:spAutoFit/>
-          </a:bodyPr>
-          <a:lstStyle/>
-          <a:p>
-            <a:pPr algn="ctr">
-              <a:lnSpc>
-                <a:spcPct val="115000"/>
-              </a:lnSpc>
-            </a:pPr>
-            <a:r>
-              <a:rPr sz="1100" b="1" i="0">
-                <a:solidFill>
-                  <a:srgbClr val="8C8378"/>
-                </a:solidFill>
-                <a:latin typeface="Helvetica Neue"/>
-              </a:rPr>
-              <a:t>ROUND 3</a:t>
-            </a:r>
-          </a:p>
-        </p:txBody>
-      </p:sp>
-      <p:sp>
-        <p:nvSpPr>
-          <p:cNvPr id="17" name="Rectangle 16"/>
+              <a:t>cross-domain · mixed LLMs · n = 200</a:t>
+            </a:r>
+          </a:p>
+        </p:txBody>
+      </p:sp>
+      <p:sp>
+        <p:nvSpPr>
+          <p:cNvPr id="18" name="Rectangle 17"/>
           <p:cNvSpPr/>
           <p:nvPr/>
         </p:nvSpPr>
         <p:spPr>
           <a:xfrm>
-            <a:off x="548640" y="5120640"/>
-            <a:ext cx="11064240" cy="1188720"/>
+            <a:off x="548640" y="5257800"/>
+            <a:ext cx="11064240" cy="1143000"/>
           </a:xfrm>
           <a:prstGeom prst="rect">
             <a:avLst/>
@@ -4116,14 +4163,14 @@
       </p:sp>
       <p:sp>
         <p:nvSpPr>
-          <p:cNvPr id="18" name="TextBox 17"/>
-          <p:cNvSpPr txBox="1"/>
-          <p:nvPr/>
-        </p:nvSpPr>
-        <p:spPr>
-          <a:xfrm>
-            <a:off x="777240" y="5257800"/>
-            <a:ext cx="10515600" cy="1097280"/>
+          <p:cNvPr id="19" name="TextBox 18"/>
+          <p:cNvSpPr txBox="1"/>
+          <p:nvPr/>
+        </p:nvSpPr>
+        <p:spPr>
+          <a:xfrm>
+            <a:off x="777240" y="5376672"/>
+            <a:ext cx="10515600" cy="1051560"/>
           </a:xfrm>
           <a:prstGeom prst="rect">
             <a:avLst/>
@@ -4142,13 +4189,13 @@
               </a:lnSpc>
             </a:pPr>
             <a:r>
-              <a:rPr sz="1500" b="0" i="1">
+              <a:rPr sz="1400" b="0" i="1">
                 <a:solidFill>
                   <a:srgbClr val="1A1A1A"/>
                 </a:solidFill>
                 <a:latin typeface="Georgia"/>
               </a:rPr>
-              <a:t>That's a 27% relative reduction in three rounds. The detector is seeing fakes</a:t>
+              <a:t>Same detector, three families. 99% vs 0.7% evasion — the family matters more than</a:t>
             </a:r>
           </a:p>
           <a:p>
@@ -4158,13 +4205,13 @@
               </a:lnSpc>
             </a:pPr>
             <a:r>
-              <a:rPr sz="1500" b="0" i="1">
+              <a:rPr sz="1400" b="0" i="1">
                 <a:solidFill>
                   <a:srgbClr val="1A1A1A"/>
                 </a:solidFill>
                 <a:latin typeface="Georgia"/>
               </a:rPr>
-              <a:t>it previously missed, retraining on them, and getting harder to fool. This is</a:t>
+              <a:t>any round of retraining. A published detector has to disclose which generator family</a:t>
             </a:r>
           </a:p>
           <a:p>
@@ -4174,13 +4221,13 @@
               </a:lnSpc>
             </a:pPr>
             <a:r>
-              <a:rPr sz="1500" b="0" i="1">
+              <a:rPr sz="1400" b="0" i="1">
                 <a:solidFill>
                   <a:srgbClr val="1A1A1A"/>
                 </a:solidFill>
                 <a:latin typeface="Georgia"/>
               </a:rPr>
-              <a:t>the adversarial-training story in one graph.</a:t>
+              <a:t>it was trained against. That's the real headline here.</a:t>
             </a:r>
           </a:p>
         </p:txBody>
@@ -4623,7 +4670,7 @@
                 </a:solidFill>
                 <a:latin typeface="Menlo"/>
               </a:rPr>
-              <a:t>AUC 0.982  ·  F1 0.947  ·  Evasion 0.00</a:t>
+              <a:t>AUC 0.9993  ·  F1 0.9797  ·  Evasion 0.007</a:t>
             </a:r>
           </a:p>
         </p:txBody>
@@ -4775,7 +4822,7 @@
                 </a:solidFill>
                 <a:latin typeface="Menlo"/>
               </a:rPr>
-              <a:t>AUC 0.982  ·  F1 0.947  ·  Evasion 0.00</a:t>
+              <a:t>AUC 0.9993  ·  F1 0.9797  ·  Evasion 0.007</a:t>
             </a:r>
           </a:p>
         </p:txBody>
@@ -5227,7 +5274,7 @@
                 </a:solidFill>
                 <a:latin typeface="Georgia"/>
               </a:rPr>
-              <a:t>96%</a:t>
+              <a:t>98%</a:t>
             </a:r>
           </a:p>
         </p:txBody>
@@ -5734,7 +5781,7 @@
                 </a:solidFill>
                 <a:latin typeface="Helvetica Neue"/>
               </a:rPr>
-              <a:t>Both caught during an earlier smoke run. Both verified fixed on the 500-scale run.</a:t>
+              <a:t>Both caught during the smoke run. Both verified fixed at 3,000-sample scale.</a:t>
             </a:r>
           </a:p>
         </p:txBody>
@@ -6438,7 +6485,7 @@
                 </a:solidFill>
                 <a:latin typeface="Georgia"/>
               </a:rPr>
-              <a:t>Six hours and twenty-three minutes.</a:t>
+              <a:t>Ten hours and one minute.</a:t>
             </a:r>
           </a:p>
         </p:txBody>
@@ -7410,7 +7457,7 @@
                 </a:solidFill>
                 <a:latin typeface="Georgia"/>
               </a:rPr>
-              <a:t>3,984 samples produced</a:t>
+              <a:t>5,622 samples produced</a:t>
             </a:r>
           </a:p>
         </p:txBody>
@@ -7449,7 +7496,7 @@
                 </a:solidFill>
                 <a:latin typeface="Helvetica Neue"/>
               </a:rPr>
-              <a:t>across real, BioMistral, SeqGAN, RAID</a:t>
+              <a:t>across real, BioMistral, SeqGAN, + 200 RAID eval</a:t>
             </a:r>
           </a:p>
         </p:txBody>
@@ -7986,7 +8033,7 @@
                 </a:solidFill>
                 <a:latin typeface="Georgia"/>
               </a:rPr>
-              <a:t>1,000 samples</a:t>
+              <a:t>3,000 samples</a:t>
             </a:r>
           </a:p>
         </p:txBody>
@@ -8064,7 +8111,7 @@
                 </a:solidFill>
                 <a:latin typeface="Georgia"/>
               </a:rPr>
-              <a:t>n = 100</a:t>
+              <a:t>n = 300</a:t>
             </a:r>
           </a:p>
         </p:txBody>
@@ -8142,7 +8189,7 @@
                 </a:solidFill>
                 <a:latin typeface="Georgia"/>
               </a:rPr>
-              <a:t>6 h 23 m</a:t>
+              <a:t>10 h 01 m</a:t>
             </a:r>
           </a:p>
         </p:txBody>
@@ -8220,7 +8267,7 @@
                 </a:solidFill>
                 <a:latin typeface="Georgia"/>
               </a:rPr>
-              <a:t>±5.0% CI</a:t>
+              <a:t>±2.9% CI</a:t>
             </a:r>
           </a:p>
         </p:txBody>
@@ -8544,7 +8591,7 @@
                 </a:solidFill>
                 <a:latin typeface="Georgia"/>
               </a:rPr>
-              <a:t>n = 200</a:t>
+              <a:t>n = 400</a:t>
             </a:r>
           </a:p>
         </p:txBody>
@@ -8622,7 +8669,7 @@
                 </a:solidFill>
                 <a:latin typeface="Georgia"/>
               </a:rPr>
-              <a:t>~24 h</a:t>
+              <a:t>~16 h</a:t>
             </a:r>
           </a:p>
         </p:txBody>
@@ -8700,7 +8747,7 @@
                 </a:solidFill>
                 <a:latin typeface="Georgia"/>
               </a:rPr>
-              <a:t>±3.5% CI</a:t>
+              <a:t>±2.5% CI</a:t>
             </a:r>
           </a:p>
         </p:txBody>
@@ -9024,7 +9071,7 @@
                 </a:solidFill>
                 <a:latin typeface="Georgia"/>
               </a:rPr>
-              <a:t>n = 1,000</a:t>
+              <a:t>n = 2,000</a:t>
             </a:r>
           </a:p>
         </p:txBody>
@@ -9102,7 +9149,7 @@
                 </a:solidFill>
                 <a:latin typeface="Georgia"/>
               </a:rPr>
-              <a:t>~80 h</a:t>
+              <a:t>~65 h</a:t>
             </a:r>
           </a:p>
         </p:txBody>
@@ -9180,7 +9227,7 @@
                 </a:solidFill>
                 <a:latin typeface="Georgia"/>
               </a:rPr>
-              <a:t>±1.5% CI</a:t>
+              <a:t>±1.1% CI</a:t>
             </a:r>
           </a:p>
         </p:txBody>
@@ -9519,7 +9566,7 @@
                 </a:solidFill>
                 <a:latin typeface="Georgia"/>
               </a:rPr>
-              <a:t>Adversarial retraining works — when fakes are actually hard.</a:t>
+              <a:t>Generator family dominates — 100× spread across families.</a:t>
             </a:r>
           </a:p>
         </p:txBody>
@@ -9558,7 +9605,7 @@
                 </a:solidFill>
                 <a:latin typeface="Helvetica Neue"/>
               </a:rPr>
-              <a:t>Condition B: 27% relative evasion reduction in three rounds.</a:t>
+              <a:t>SeqGAN 99% evasion · BioMistral 0.7% · RAID 98% — same detector, same test set.</a:t>
             </a:r>
           </a:p>
         </p:txBody>
@@ -9636,7 +9683,7 @@
                 </a:solidFill>
                 <a:latin typeface="Georgia"/>
               </a:rPr>
-              <a:t>Zero-shot fakes weren't hard enough to train against.</a:t>
+              <a:t>Adversarial retraining did not help at 3k scale.</a:t>
             </a:r>
           </a:p>
         </p:txBody>
@@ -9675,7 +9722,7 @@
                 </a:solidFill>
                 <a:latin typeface="Helvetica Neue"/>
               </a:rPr>
-              <a:t>C and D converged on A's checkpoint. Harder generators = future work.</a:t>
+              <a:t>Condition B stayed flat at ~99% evasion. C and D converged onto A's checkpoint.</a:t>
             </a:r>
           </a:p>
         </p:txBody>
@@ -9792,7 +9839,7 @@
                 </a:solidFill>
                 <a:latin typeface="Helvetica Neue"/>
               </a:rPr>
-              <a:t>RAID 0.96 evasion means one detector can't guard all domains. Own that.</a:t>
+              <a:t>RAID 98% evasion means one detector can't guard all domains. Own that.</a:t>
             </a:r>
           </a:p>
         </p:txBody>
@@ -13571,7 +13618,7 @@
                 </a:solidFill>
                 <a:latin typeface="Georgia"/>
               </a:rPr>
-              <a:t>1,000</a:t>
+              <a:t>3,000</a:t>
             </a:r>
           </a:p>
         </p:txBody>
@@ -13723,7 +13770,7 @@
                 </a:solidFill>
                 <a:latin typeface="Georgia"/>
               </a:rPr>
-              <a:t>500</a:t>
+              <a:t>1,500</a:t>
             </a:r>
           </a:p>
         </p:txBody>
@@ -13801,7 +13848,7 @@
                 </a:solidFill>
                 <a:latin typeface="Georgia"/>
               </a:rPr>
-              <a:t>500</a:t>
+              <a:t>1,500</a:t>
             </a:r>
           </a:p>
         </p:txBody>
@@ -13957,7 +14004,7 @@
                 </a:solidFill>
                 <a:latin typeface="Georgia"/>
               </a:rPr>
-              <a:t>n = 100</a:t>
+              <a:t>n = 300</a:t>
             </a:r>
           </a:p>
         </p:txBody>
@@ -13996,7 +14043,7 @@
                 </a:solidFill>
                 <a:latin typeface="Helvetica Neue"/>
               </a:rPr>
-              <a:t>held-out test set, same distribution as training</a:t>
+              <a:t>held-out test set, ±2.9% CI on AUC</a:t>
             </a:r>
           </a:p>
         </p:txBody>
@@ -15341,13 +15388,13 @@
               </a:lnSpc>
             </a:pPr>
             <a:r>
-              <a:rPr sz="22000" b="0" i="1">
+              <a:rPr sz="20000" b="0" i="1">
                 <a:solidFill>
                   <a:srgbClr val="1A1A1A"/>
                 </a:solidFill>
                 <a:latin typeface="Georgia"/>
               </a:rPr>
-              <a:t>0.989</a:t>
+              <a:t>0.9997</a:t>
             </a:r>
           </a:p>
         </p:txBody>
@@ -15386,7 +15433,7 @@
                 </a:solidFill>
                 <a:latin typeface="Helvetica Neue"/>
               </a:rPr>
-              <a:t>Test-set AUC  ·  Condition A  ·  n = 100</a:t>
+              <a:t>Test-set AUC  ·  Condition A  ·  n = 300</a:t>
             </a:r>
           </a:p>
         </p:txBody>
@@ -15538,7 +15585,7 @@
                 </a:solidFill>
                 <a:latin typeface="Georgia"/>
               </a:rPr>
-              <a:t>0.938</a:t>
+              <a:t>0.9797</a:t>
             </a:r>
           </a:p>
         </p:txBody>
@@ -15616,7 +15663,7 @@
                 </a:solidFill>
                 <a:latin typeface="Georgia"/>
               </a:rPr>
-              <a:t>0.94</a:t>
+              <a:t>0.98</a:t>
             </a:r>
           </a:p>
         </p:txBody>
@@ -15694,7 +15741,7 @@
                 </a:solidFill>
                 <a:latin typeface="Georgia"/>
               </a:rPr>
-              <a:t>800</a:t>
+              <a:t>2,400</a:t>
             </a:r>
           </a:p>
         </p:txBody>
